--- a/EDRMS_Util_Report_3.pptx
+++ b/EDRMS_Util_Report_3.pptx
@@ -11869,7 +11869,7 @@
                           <a:ea typeface="Calibri" pitchFamily="34" charset="-122"/>
                           <a:cs typeface="Calibri" pitchFamily="34" charset="-120"/>
                         </a:rPr>
-                        <a:t>Two levels: department, then division. Countries, RMs and offices are divisions.</a:t>
+                        <a:t>Confirmed 28 August: Department HQ, then division. Countries, RMs and offices are divisions.</a:t>
                       </a:r>
                       <a:endParaRPr lang="en-US" sz="1000" dirty="0">
                         <a:latin typeface="Calibri" charset="0"/>
@@ -12713,7 +12713,7 @@
                           <a:ea typeface="Calibri" pitchFamily="34" charset="-122"/>
                           <a:cs typeface="Calibri" pitchFamily="34" charset="-120"/>
                         </a:rPr>
-                        <a:t>We read it as the department, office or RM on that row.</a:t>
+                        <a:t>We read it as the department on that row.</a:t>
                       </a:r>
                       <a:endParaRPr lang="en-US" sz="1000" dirty="0">
                         <a:latin typeface="Calibri" charset="0"/>
@@ -21449,7 +21449,7 @@
                 <a:ea typeface="Calibri" pitchFamily="34" charset="-122"/>
                 <a:cs typeface="Calibri" pitchFamily="34" charset="-120"/>
               </a:rPr>
-              <a:t>Every department, office and RM with its sites, documents, records and counterparts.</a:t>
+              <a:t>Every department with its sites, documents, records and counterparts.</a:t>
             </a:r>
             <a:endParaRPr lang="en-US" sz="950" dirty="0"/>
           </a:p>
@@ -22740,7 +22740,7 @@
                           <a:ea typeface="Calibri" pitchFamily="34" charset="-122"/>
                           <a:cs typeface="Calibri" pitchFamily="34" charset="-120"/>
                         </a:rPr>
-                        <a:t>EDRMS sites, grouped by department, office or RM</a:t>
+                        <a:t>EDRMS sites, grouped by department HQ</a:t>
                       </a:r>
                       <a:endParaRPr lang="en-US" sz="1000" dirty="0">
                         <a:latin typeface="Calibri" charset="0"/>
@@ -25715,7 +25715,7 @@
                           <a:ea typeface="Calibri" pitchFamily="34" charset="-122"/>
                           <a:cs typeface="Calibri" pitchFamily="34" charset="-120"/>
                         </a:rPr>
-                        <a:t>The owning unit of each site</a:t>
+                        <a:t>The owning department. Narrowed to Department HQ on 28 August.</a:t>
                       </a:r>
                       <a:endParaRPr lang="en-US" sz="1000" dirty="0">
                         <a:latin typeface="Calibri" charset="0"/>
@@ -28517,7 +28517,7 @@
                 <a:ea typeface="Calibri" pitchFamily="34" charset="-122"/>
                 <a:cs typeface="Calibri" pitchFamily="34" charset="-120"/>
               </a:rPr>
-              <a:t>One unit's own view. Pick a department, office or RM and everything below refreshes for it.</a:t>
+              <a:t>One department's own view. Pick a department and everything below refreshes for it.</a:t>
             </a:r>
             <a:endParaRPr lang="en-US" sz="1300" dirty="0"/>
           </a:p>

--- a/EDRMS_Util_Report_3.pptx
+++ b/EDRMS_Util_Report_3.pptx
@@ -5942,7 +5942,7 @@
                           <a:ea typeface="Calibri" pitchFamily="34" charset="-122"/>
                           <a:cs typeface="Calibri" pitchFamily="34" charset="-120"/>
                         </a:rPr>
-                        <a:t>Declared records flagged as having a paper counterpart</a:t>
+                        <a:t>Declared records flagged as having a physical counterpart</a:t>
                       </a:r>
                       <a:endParaRPr lang="en-US" sz="1000" dirty="0">
                         <a:latin typeface="Calibri" charset="0"/>
@@ -8291,7 +8291,7 @@
                           <a:ea typeface="Calibri" pitchFamily="34" charset="-122"/>
                           <a:cs typeface="Calibri" pitchFamily="34" charset="-120"/>
                         </a:rPr>
-                        <a:t>Declared records and paper counterparts per site</a:t>
+                        <a:t>Declared records and physical counterparts per site</a:t>
                       </a:r>
                       <a:endParaRPr lang="en-US" sz="950" dirty="0">
                         <a:latin typeface="Calibri" charset="0"/>
@@ -23856,7 +23856,7 @@
                           <a:ea typeface="Calibri" pitchFamily="34" charset="-122"/>
                           <a:cs typeface="Calibri" pitchFamily="34" charset="-120"/>
                         </a:rPr>
-                        <a:t>Declared records flagged as having a paper counterpart</a:t>
+                        <a:t>Declared records flagged as having a physical counterpart</a:t>
                       </a:r>
                       <a:endParaRPr lang="en-US" sz="1000" dirty="0">
                         <a:latin typeface="Calibri" charset="0"/>

--- a/EDRMS_Util_Report_3.pptx
+++ b/EDRMS_Util_Report_3.pptx
@@ -29162,7 +29162,7 @@
                 <a:ea typeface="Calibri" pitchFamily="34" charset="-122"/>
                 <a:cs typeface="Calibri" pitchFamily="34" charset="-120"/>
               </a:rPr>
-              <a:t>Page views and visited pages per site, over a window you choose.</a:t>
+              <a:t>Page views and visited pages per site, over the reporting window.</a:t>
             </a:r>
             <a:endParaRPr lang="en-US" sz="950" dirty="0"/>
           </a:p>
@@ -29377,7 +29377,7 @@
                 <a:ea typeface="Calibri" pitchFamily="34" charset="-122"/>
                 <a:cs typeface="Calibri" pitchFamily="34" charset="-120"/>
               </a:rPr>
-              <a:t>Libraries inside the unit's sites, grouped by file plan category.</a:t>
+              <a:t>Libraries inside the department's sites, grouped by file plan category.</a:t>
             </a:r>
             <a:endParaRPr lang="en-US" sz="950" dirty="0"/>
           </a:p>

--- a/EDRMS_Util_Report_3.pptx
+++ b/EDRMS_Util_Report_3.pptx
@@ -4547,7 +4547,7 @@
                           <a:ea typeface="Calibri" pitchFamily="34" charset="-122"/>
                           <a:cs typeface="Calibri" pitchFamily="34" charset="-120"/>
                         </a:rPr>
-                        <a:t>Sites provisioned to this unit</a:t>
+                        <a:t>Sites provisioned to this department</a:t>
                       </a:r>
                       <a:endParaRPr lang="en-US" sz="1000" dirty="0">
                         <a:latin typeface="Calibri" charset="0"/>
@@ -4826,7 +4826,7 @@
                           <a:ea typeface="Calibri" pitchFamily="34" charset="-122"/>
                           <a:cs typeface="Calibri" pitchFamily="34" charset="-120"/>
                         </a:rPr>
-                        <a:t>People with recorded activity for this unit</a:t>
+                        <a:t>People with recorded activity for this department</a:t>
                       </a:r>
                       <a:endParaRPr lang="en-US" sz="1000" dirty="0">
                         <a:latin typeface="Calibri" charset="0"/>
@@ -5384,7 +5384,7 @@
                           <a:ea typeface="Calibri" pitchFamily="34" charset="-122"/>
                           <a:cs typeface="Calibri" pitchFamily="34" charset="-120"/>
                         </a:rPr>
-                        <a:t>File count across the unit's sites</a:t>
+                        <a:t>File count across the department's sites</a:t>
                       </a:r>
                       <a:endParaRPr lang="en-US" sz="1000" dirty="0">
                         <a:latin typeface="Calibri" charset="0"/>
@@ -5663,7 +5663,7 @@
                           <a:ea typeface="Calibri" pitchFamily="34" charset="-122"/>
                           <a:cs typeface="Calibri" pitchFamily="34" charset="-120"/>
                         </a:rPr>
-                        <a:t>Declared records for the unit's sites</a:t>
+                        <a:t>Declared records for the department's sites</a:t>
                       </a:r>
                       <a:endParaRPr lang="en-US" sz="1000" dirty="0">
                         <a:latin typeface="Calibri" charset="0"/>
@@ -6500,7 +6500,7 @@
                           <a:ea typeface="Calibri" pitchFamily="34" charset="-122"/>
                           <a:cs typeface="Calibri" pitchFamily="34" charset="-120"/>
                         </a:rPr>
-                        <a:t>When the unit went live on EDRMS</a:t>
+                        <a:t>When the department went live on EDRMS</a:t>
                       </a:r>
                       <a:endParaRPr lang="en-US" sz="1000" dirty="0">
                         <a:latin typeface="Calibri" charset="0"/>
@@ -7733,7 +7733,7 @@
                           <a:ea typeface="Calibri" pitchFamily="34" charset="-122"/>
                           <a:cs typeface="Calibri" pitchFamily="34" charset="-120"/>
                         </a:rPr>
-                        <a:t>Each site the unit owns and who owns it</a:t>
+                        <a:t>Each site the department owns and who owns it</a:t>
                       </a:r>
                       <a:endParaRPr lang="en-US" sz="950" dirty="0">
                         <a:latin typeface="Calibri" charset="0"/>
@@ -28732,7 +28732,7 @@
                 <a:ea typeface="Calibri" pitchFamily="34" charset="-122"/>
                 <a:cs typeface="Calibri" pitchFamily="34" charset="-120"/>
               </a:rPr>
-              <a:t>Seven tiles for the selected unit, each opening its own table.</a:t>
+              <a:t>Seven tiles for the selected department, each opening its own table.</a:t>
             </a:r>
             <a:endParaRPr lang="en-US" sz="950" dirty="0"/>
           </a:p>
@@ -28947,7 +28947,7 @@
                 <a:ea typeface="Calibri" pitchFamily="34" charset="-122"/>
                 <a:cs typeface="Calibri" pitchFamily="34" charset="-120"/>
               </a:rPr>
-              <a:t>Every site the unit owns, with its owner, documents, records and counterparts.</a:t>
+              <a:t>Every site the department owns, with its owner, documents, records and counterparts.</a:t>
             </a:r>
             <a:endParaRPr lang="en-US" sz="950" dirty="0"/>
           </a:p>
